--- a/Perx_Presentation.pptx
+++ b/Perx_Presentation.pptx
@@ -9025,7 +9025,7 @@
         <p:spPr>
           <a:xfrm>
             <a:off x="4023360" y="1481328"/>
-            <a:ext cx="7223760" cy="594360"/>
+            <a:ext cx="7223760" cy="692497"/>
           </a:xfrm>
           <a:prstGeom prst="rect">
             <a:avLst/>
@@ -9040,13 +9040,48 @@
           <a:p>
             <a:pPr algn="l"/>
             <a:r>
-              <a:rPr sz="1300" b="0" i="0">
+              <a:rPr sz="1300" b="0" i="0" dirty="0">
                 <a:solidFill>
                   <a:srgbClr val="E2D8F0"/>
                 </a:solidFill>
               </a:rPr>
               <a:t>Browse 10 live perks across 9 categories · redeem with one click · track budget</a:t>
             </a:r>
+            <a:br>
+              <a:rPr lang="en-US" sz="1300" b="0" i="0" dirty="0">
+                <a:solidFill>
+                  <a:srgbClr val="E2D8F0"/>
+                </a:solidFill>
+              </a:rPr>
+            </a:br>
+            <a:r>
+              <a:rPr lang="en-US" sz="1300" b="0" i="0" dirty="0">
+                <a:solidFill>
+                  <a:srgbClr val="E2D8F0"/>
+                </a:solidFill>
+              </a:rPr>
+              <a:t>USERNAME: junction@company.al</a:t>
+            </a:r>
+            <a:br>
+              <a:rPr lang="en-US" sz="1300" b="0" i="0" dirty="0">
+                <a:solidFill>
+                  <a:srgbClr val="E2D8F0"/>
+                </a:solidFill>
+              </a:rPr>
+            </a:br>
+            <a:r>
+              <a:rPr lang="en-US" sz="1300" b="0" i="0" dirty="0">
+                <a:solidFill>
+                  <a:srgbClr val="E2D8F0"/>
+                </a:solidFill>
+              </a:rPr>
+              <a:t>PASSWORD: albania123</a:t>
+            </a:r>
+            <a:endParaRPr sz="1300" b="0" i="0" dirty="0">
+              <a:solidFill>
+                <a:srgbClr val="E2D8F0"/>
+              </a:solidFill>
+            </a:endParaRPr>
           </a:p>
         </p:txBody>
       </p:sp>
